--- a/Fluctus_Laadplan_Ferrieres.pptx
+++ b/Fluctus_Laadplan_Ferrieres.pptx
@@ -11102,7 +11102,46 @@
       </p:sp>
       <p:sp>
         <p:nvSpPr>
-          <p:cNvPr id="81" name="Shape 79"/>
+          <p:cNvPr id="81" name="Text 79"/>
+          <p:cNvSpPr/>
+          <p:nvPr/>
+        </p:nvSpPr>
+        <p:spPr>
+          <a:xfrm>
+            <a:off x="640080" y="6071616"/>
+            <a:ext cx="10058400" cy="237744"/>
+          </a:xfrm>
+          <a:prstGeom prst="rect">
+            <a:avLst/>
+          </a:prstGeom>
+          <a:noFill/>
+          <a:ln/>
+        </p:spPr>
+        <p:txBody>
+          <a:bodyPr wrap="square" lIns="0" tIns="0" rIns="0" bIns="0" rtlCol="0" anchor="ctr"/>
+          <a:lstStyle/>
+          <a:p>
+            <a:pPr indent="0" marL="0">
+              <a:buNone/>
+            </a:pPr>
+            <a:r>
+              <a:rPr lang="en-US" sz="800" i="1" dirty="0">
+                <a:solidFill>
+                  <a:srgbClr val="5A6473"/>
+                </a:solidFill>
+                <a:latin typeface="Arial" pitchFamily="34" charset="0"/>
+                <a:ea typeface="Arial" pitchFamily="34" charset="-122"/>
+                <a:cs typeface="Arial" pitchFamily="34" charset="-120"/>
+              </a:rPr>
+              <a:t>Bron bestaande laadpunten: Departement Mobiliteit en Openbare Werken (Vlaanderen).</a:t>
+            </a:r>
+            <a:endParaRPr lang="en-US" sz="800" dirty="0"/>
+          </a:p>
+        </p:txBody>
+      </p:sp>
+      <p:sp>
+        <p:nvSpPr>
+          <p:cNvPr id="82" name="Shape 80"/>
           <p:cNvSpPr/>
           <p:nvPr/>
         </p:nvSpPr>
@@ -11122,7 +11161,7 @@
       </p:sp>
       <p:pic>
         <p:nvPicPr>
-          <p:cNvPr id="82" name="Image 0" descr="preencoded.png">    </p:cNvPr>
+          <p:cNvPr id="83" name="Image 0" descr="preencoded.png">    </p:cNvPr>
           <p:cNvPicPr>
             <a:picLocks noChangeAspect="1"/>
           </p:cNvPicPr>
@@ -11146,7 +11185,7 @@
       </p:pic>
       <p:sp>
         <p:nvSpPr>
-          <p:cNvPr id="83" name="Text 80"/>
+          <p:cNvPr id="84" name="Text 81"/>
           <p:cNvSpPr/>
           <p:nvPr/>
         </p:nvSpPr>
@@ -11188,7 +11227,7 @@
       </p:sp>
       <p:sp>
         <p:nvSpPr>
-          <p:cNvPr id="84" name="Shape 81"/>
+          <p:cNvPr id="85" name="Shape 82"/>
           <p:cNvSpPr/>
           <p:nvPr/>
         </p:nvSpPr>
@@ -11208,7 +11247,7 @@
       </p:sp>
       <p:pic>
         <p:nvPicPr>
-          <p:cNvPr id="85" name="Image 1" descr="preencoded.png">    </p:cNvPr>
+          <p:cNvPr id="86" name="Image 1" descr="preencoded.png">    </p:cNvPr>
           <p:cNvPicPr>
             <a:picLocks noChangeAspect="1"/>
           </p:cNvPicPr>
@@ -11232,7 +11271,7 @@
       </p:pic>
       <p:sp>
         <p:nvSpPr>
-          <p:cNvPr id="86" name="Text 82"/>
+          <p:cNvPr id="87" name="Text 83"/>
           <p:cNvSpPr/>
           <p:nvPr/>
         </p:nvSpPr>
@@ -11274,7 +11313,7 @@
       </p:sp>
       <p:sp>
         <p:nvSpPr>
-          <p:cNvPr id="87" name="Shape 83"/>
+          <p:cNvPr id="88" name="Shape 84"/>
           <p:cNvSpPr/>
           <p:nvPr/>
         </p:nvSpPr>
@@ -11294,7 +11333,7 @@
       </p:sp>
       <p:pic>
         <p:nvPicPr>
-          <p:cNvPr id="88" name="Image 2" descr="preencoded.png">    </p:cNvPr>
+          <p:cNvPr id="89" name="Image 2" descr="preencoded.png">    </p:cNvPr>
           <p:cNvPicPr>
             <a:picLocks noChangeAspect="1"/>
           </p:cNvPicPr>
@@ -11318,7 +11357,7 @@
       </p:pic>
       <p:sp>
         <p:nvSpPr>
-          <p:cNvPr id="89" name="Text 84"/>
+          <p:cNvPr id="90" name="Text 85"/>
           <p:cNvSpPr/>
           <p:nvPr/>
         </p:nvSpPr>
@@ -11360,7 +11399,7 @@
       </p:sp>
       <p:sp>
         <p:nvSpPr>
-          <p:cNvPr id="90" name="Text 85"/>
+          <p:cNvPr id="91" name="Text 86"/>
           <p:cNvSpPr/>
           <p:nvPr/>
         </p:nvSpPr>
@@ -11399,7 +11438,7 @@
       </p:sp>
       <p:sp>
         <p:nvSpPr>
-          <p:cNvPr id="91" name="Text 86"/>
+          <p:cNvPr id="92" name="Text 87"/>
           <p:cNvSpPr/>
           <p:nvPr/>
         </p:nvSpPr>
